--- a/day-2-power-query-and-dataflows/day-2-power-query-dataflows.pptx
+++ b/day-2-power-query-and-dataflows/day-2-power-query-dataflows.pptx
@@ -252,7 +252,7 @@
           <a:p>
             <a:fld id="{17A98A70-FA8C-4354-959C-C70678AC9BCF}" type="datetimeFigureOut">
               <a:rPr lang="en-US" smtClean="0"/>
-              <a:t>4/7/2026</a:t>
+              <a:t>4/8/2026</a:t>
             </a:fld>
             <a:endParaRPr lang="en-US"/>
           </a:p>
@@ -820,21 +820,25 @@
           <a:lstStyle/>
           <a:p>
             <a:r>
+              <a:rPr dirty="0"/>
               <a:t>Here's what today looks like. We'll start by looking at a deliberately messy real-world data file, and we'll point Copilot at it to see what happens when AI meets bad data. Spoiler: it falls apart in some pretty entertaining ways.</a:t>
             </a:r>
           </a:p>
           <a:p>
             <a:r>
+              <a:rPr dirty="0"/>
               <a:t>Then we'll fix the data — properly, in Power Query — using the core transformations every analyst should know. Unpivot, split, merge, types, names. Boring? A little. The most important skill in modern Excel? Yes.</a:t>
             </a:r>
           </a:p>
           <a:p>
             <a:r>
+              <a:rPr dirty="0"/>
               <a:t>Once the local cleanup works, we'll lift the same logic into a Dataflow. This is the mindset shift I want you to internalize today: Power Query in Excel cleans the file on your laptop, Dataflows clean the data source in the cloud for everybody. Same tool, completely different scale.</a:t>
             </a:r>
           </a:p>
           <a:p>
             <a:r>
+              <a:rPr dirty="0"/>
               <a:t>The cleaned table will land in Dataverse. Now it's governed, refreshable, secure, and shareable across Excel, Power BI, Power Automate, Copilot Studio, the works. By the end of the hour, you'll have built a real, production-grade data pipeline. And on Friday when we build a custom copilot, this is the table it's going to reach for.</a:t>
             </a:r>
           </a:p>
@@ -1364,7 +1368,7 @@
             <a:fld id="{1D8BD707-D9CF-40AE-B4C6-C98DA3205C09}" type="datetimeFigureOut">
               <a:rPr lang="en-US" smtClean="0"/>
               <a:pPr/>
-              <a:t>4/7/2026</a:t>
+              <a:t>4/8/2026</a:t>
             </a:fld>
             <a:endParaRPr lang="en-US"/>
           </a:p>
@@ -1529,7 +1533,7 @@
             <a:fld id="{1D8BD707-D9CF-40AE-B4C6-C98DA3205C09}" type="datetimeFigureOut">
               <a:rPr lang="en-US" smtClean="0"/>
               <a:pPr/>
-              <a:t>4/7/2026</a:t>
+              <a:t>4/8/2026</a:t>
             </a:fld>
             <a:endParaRPr lang="en-US"/>
           </a:p>
@@ -1704,7 +1708,7 @@
             <a:fld id="{1D8BD707-D9CF-40AE-B4C6-C98DA3205C09}" type="datetimeFigureOut">
               <a:rPr lang="en-US" smtClean="0"/>
               <a:pPr/>
-              <a:t>4/7/2026</a:t>
+              <a:t>4/8/2026</a:t>
             </a:fld>
             <a:endParaRPr lang="en-US"/>
           </a:p>
@@ -1869,7 +1873,7 @@
             <a:fld id="{1D8BD707-D9CF-40AE-B4C6-C98DA3205C09}" type="datetimeFigureOut">
               <a:rPr lang="en-US" smtClean="0"/>
               <a:pPr/>
-              <a:t>4/7/2026</a:t>
+              <a:t>4/8/2026</a:t>
             </a:fld>
             <a:endParaRPr lang="en-US"/>
           </a:p>
@@ -2111,7 +2115,7 @@
             <a:fld id="{1D8BD707-D9CF-40AE-B4C6-C98DA3205C09}" type="datetimeFigureOut">
               <a:rPr lang="en-US" smtClean="0"/>
               <a:pPr/>
-              <a:t>4/7/2026</a:t>
+              <a:t>4/8/2026</a:t>
             </a:fld>
             <a:endParaRPr lang="en-US"/>
           </a:p>
@@ -2393,7 +2397,7 @@
             <a:fld id="{1D8BD707-D9CF-40AE-B4C6-C98DA3205C09}" type="datetimeFigureOut">
               <a:rPr lang="en-US" smtClean="0"/>
               <a:pPr/>
-              <a:t>4/7/2026</a:t>
+              <a:t>4/8/2026</a:t>
             </a:fld>
             <a:endParaRPr lang="en-US"/>
           </a:p>
@@ -2809,7 +2813,7 @@
             <a:fld id="{1D8BD707-D9CF-40AE-B4C6-C98DA3205C09}" type="datetimeFigureOut">
               <a:rPr lang="en-US" smtClean="0"/>
               <a:pPr/>
-              <a:t>4/7/2026</a:t>
+              <a:t>4/8/2026</a:t>
             </a:fld>
             <a:endParaRPr lang="en-US"/>
           </a:p>
@@ -2923,7 +2927,7 @@
             <a:fld id="{1D8BD707-D9CF-40AE-B4C6-C98DA3205C09}" type="datetimeFigureOut">
               <a:rPr lang="en-US" smtClean="0"/>
               <a:pPr/>
-              <a:t>4/7/2026</a:t>
+              <a:t>4/8/2026</a:t>
             </a:fld>
             <a:endParaRPr lang="en-US"/>
           </a:p>
@@ -3015,7 +3019,7 @@
             <a:fld id="{1D8BD707-D9CF-40AE-B4C6-C98DA3205C09}" type="datetimeFigureOut">
               <a:rPr lang="en-US" smtClean="0"/>
               <a:pPr/>
-              <a:t>4/7/2026</a:t>
+              <a:t>4/8/2026</a:t>
             </a:fld>
             <a:endParaRPr lang="en-US"/>
           </a:p>
@@ -3287,7 +3291,7 @@
             <a:fld id="{1D8BD707-D9CF-40AE-B4C6-C98DA3205C09}" type="datetimeFigureOut">
               <a:rPr lang="en-US" smtClean="0"/>
               <a:pPr/>
-              <a:t>4/7/2026</a:t>
+              <a:t>4/8/2026</a:t>
             </a:fld>
             <a:endParaRPr lang="en-US"/>
           </a:p>
@@ -3536,7 +3540,7 @@
             <a:fld id="{1D8BD707-D9CF-40AE-B4C6-C98DA3205C09}" type="datetimeFigureOut">
               <a:rPr lang="en-US" smtClean="0"/>
               <a:pPr/>
-              <a:t>4/7/2026</a:t>
+              <a:t>4/8/2026</a:t>
             </a:fld>
             <a:endParaRPr lang="en-US"/>
           </a:p>
@@ -3749,7 +3753,7 @@
             <a:fld id="{1D8BD707-D9CF-40AE-B4C6-C98DA3205C09}" type="datetimeFigureOut">
               <a:rPr lang="en-US" smtClean="0"/>
               <a:pPr/>
-              <a:t>4/7/2026</a:t>
+              <a:t>4/8/2026</a:t>
             </a:fld>
             <a:endParaRPr lang="en-US"/>
           </a:p>
@@ -4588,6 +4592,42 @@
           </a:prstGeom>
         </p:spPr>
       </p:pic>
+      <p:pic>
+        <p:nvPicPr>
+          <p:cNvPr id="6" name="Picture 5">
+            <a:extLst>
+              <a:ext uri="{FF2B5EF4-FFF2-40B4-BE49-F238E27FC236}">
+                <a16:creationId xmlns:a16="http://schemas.microsoft.com/office/drawing/2014/main" id="{DE376B3E-AE87-3C32-1363-F30464362B48}"/>
+              </a:ext>
+            </a:extLst>
+          </p:cNvPr>
+          <p:cNvPicPr>
+            <a:picLocks noChangeAspect="1"/>
+          </p:cNvPicPr>
+          <p:nvPr/>
+        </p:nvPicPr>
+        <p:blipFill>
+          <a:blip r:embed="rId4">
+            <a:extLst>
+              <a:ext uri="{28A0092B-C50C-407E-A947-70E740481C1C}">
+                <a14:useLocalDpi xmlns:a14="http://schemas.microsoft.com/office/drawing/2010/main" val="0"/>
+              </a:ext>
+            </a:extLst>
+          </a:blip>
+          <a:stretch>
+            <a:fillRect/>
+          </a:stretch>
+        </p:blipFill>
+        <p:spPr>
+          <a:xfrm>
+            <a:off x="7955924" y="533400"/>
+            <a:ext cx="9753600" cy="9753600"/>
+          </a:xfrm>
+          <a:prstGeom prst="rect">
+            <a:avLst/>
+          </a:prstGeom>
+        </p:spPr>
+      </p:pic>
       <p:sp>
         <p:nvSpPr>
           <p:cNvPr id="4" name="TextBox 3">
@@ -4618,7 +4658,7 @@
           <a:p>
             <a:r>
               <a:rPr lang="en-US" sz="3200" dirty="0">
-                <a:hlinkClick r:id="rId4"/>
+                <a:hlinkClick r:id="rId5"/>
               </a:rPr>
               <a:t>https://stringfestanalytics.com/how-to-understand-the-modern-excel-ai-stack/</a:t>
             </a:r>
@@ -4629,36 +4669,6 @@
           </a:p>
         </p:txBody>
       </p:sp>
-      <p:pic>
-        <p:nvPicPr>
-          <p:cNvPr id="5" name="Picture 4">
-            <a:extLst>
-              <a:ext uri="{FF2B5EF4-FFF2-40B4-BE49-F238E27FC236}">
-                <a16:creationId xmlns:a16="http://schemas.microsoft.com/office/drawing/2014/main" id="{B9D87183-BF8B-3C89-D59E-109566F38D46}"/>
-              </a:ext>
-            </a:extLst>
-          </p:cNvPr>
-          <p:cNvPicPr>
-            <a:picLocks noChangeAspect="1"/>
-          </p:cNvPicPr>
-          <p:nvPr/>
-        </p:nvPicPr>
-        <p:blipFill>
-          <a:blip r:embed="rId5"/>
-          <a:stretch>
-            <a:fillRect/>
-          </a:stretch>
-        </p:blipFill>
-        <p:spPr>
-          <a:xfrm>
-            <a:off x="8001000" y="0"/>
-            <a:ext cx="10287000" cy="10287000"/>
-          </a:xfrm>
-          <a:prstGeom prst="rect">
-            <a:avLst/>
-          </a:prstGeom>
-        </p:spPr>
-      </p:pic>
       <p:sp>
         <p:nvSpPr>
           <p:cNvPr id="2" name="Rectangle 1">
@@ -5585,7 +5595,25 @@
                 </a:solidFill>
                 <a:latin typeface="Pragmatica" panose="020B0403040502020204" pitchFamily="34" charset="0"/>
               </a:rPr>
-              <a:t>See how Agent Mode handles multi step analytical tasks</a:t>
+              <a:t>See </a:t>
+            </a:r>
+            <a:r>
+              <a:rPr lang="en-US" sz="5400">
+                <a:solidFill>
+                  <a:srgbClr val="707070"/>
+                </a:solidFill>
+                <a:latin typeface="Pragmatica" panose="020B0403040502020204" pitchFamily="34" charset="0"/>
+              </a:rPr>
+              <a:t>how Copilot handles </a:t>
+            </a:r>
+            <a:r>
+              <a:rPr lang="en-US" sz="5400" dirty="0">
+                <a:solidFill>
+                  <a:srgbClr val="707070"/>
+                </a:solidFill>
+                <a:latin typeface="Pragmatica" panose="020B0403040502020204" pitchFamily="34" charset="0"/>
+              </a:rPr>
+              <a:t>multi step analytical tasks</a:t>
             </a:r>
           </a:p>
           <a:p>
